--- a/docs/설계내용.pptx
+++ b/docs/설계내용.pptx
@@ -7,6 +7,7 @@
   <p:sldIdLst>
     <p:sldId id="256" r:id="rId2"/>
     <p:sldId id="257" r:id="rId3"/>
+    <p:sldId id="258" r:id="rId4"/>
   </p:sldIdLst>
   <p:sldSz cx="12192000" cy="6858000"/>
   <p:notesSz cx="6858000" cy="9144000"/>
@@ -105,6 +106,11 @@
       </a:defRPr>
     </a:lvl9pPr>
   </p:defaultTextStyle>
+  <p:extLst>
+    <p:ext uri="{EFAFB233-063F-42B5-8137-9DF3F51BA10A}">
+      <p15:sldGuideLst xmlns:p15="http://schemas.microsoft.com/office/powerpoint/2012/main"/>
+    </p:ext>
+  </p:extLst>
 </p:presentation>
 </file>
 
@@ -255,7 +261,7 @@
           <a:p>
             <a:fld id="{221FCC47-94F7-4F07-959D-AD5A2CDDD26C}" type="datetimeFigureOut">
               <a:rPr lang="ko-KR" altLang="en-US" smtClean="0"/>
-              <a:t>2026-01-29</a:t>
+              <a:t>2026-02-01</a:t>
             </a:fld>
             <a:endParaRPr lang="ko-KR" altLang="en-US"/>
           </a:p>
@@ -453,7 +459,7 @@
           <a:p>
             <a:fld id="{221FCC47-94F7-4F07-959D-AD5A2CDDD26C}" type="datetimeFigureOut">
               <a:rPr lang="ko-KR" altLang="en-US" smtClean="0"/>
-              <a:t>2026-01-29</a:t>
+              <a:t>2026-02-01</a:t>
             </a:fld>
             <a:endParaRPr lang="ko-KR" altLang="en-US"/>
           </a:p>
@@ -661,7 +667,7 @@
           <a:p>
             <a:fld id="{221FCC47-94F7-4F07-959D-AD5A2CDDD26C}" type="datetimeFigureOut">
               <a:rPr lang="ko-KR" altLang="en-US" smtClean="0"/>
-              <a:t>2026-01-29</a:t>
+              <a:t>2026-02-01</a:t>
             </a:fld>
             <a:endParaRPr lang="ko-KR" altLang="en-US"/>
           </a:p>
@@ -859,7 +865,7 @@
           <a:p>
             <a:fld id="{221FCC47-94F7-4F07-959D-AD5A2CDDD26C}" type="datetimeFigureOut">
               <a:rPr lang="ko-KR" altLang="en-US" smtClean="0"/>
-              <a:t>2026-01-29</a:t>
+              <a:t>2026-02-01</a:t>
             </a:fld>
             <a:endParaRPr lang="ko-KR" altLang="en-US"/>
           </a:p>
@@ -1134,7 +1140,7 @@
           <a:p>
             <a:fld id="{221FCC47-94F7-4F07-959D-AD5A2CDDD26C}" type="datetimeFigureOut">
               <a:rPr lang="ko-KR" altLang="en-US" smtClean="0"/>
-              <a:t>2026-01-29</a:t>
+              <a:t>2026-02-01</a:t>
             </a:fld>
             <a:endParaRPr lang="ko-KR" altLang="en-US"/>
           </a:p>
@@ -1399,7 +1405,7 @@
           <a:p>
             <a:fld id="{221FCC47-94F7-4F07-959D-AD5A2CDDD26C}" type="datetimeFigureOut">
               <a:rPr lang="ko-KR" altLang="en-US" smtClean="0"/>
-              <a:t>2026-01-29</a:t>
+              <a:t>2026-02-01</a:t>
             </a:fld>
             <a:endParaRPr lang="ko-KR" altLang="en-US"/>
           </a:p>
@@ -1811,7 +1817,7 @@
           <a:p>
             <a:fld id="{221FCC47-94F7-4F07-959D-AD5A2CDDD26C}" type="datetimeFigureOut">
               <a:rPr lang="ko-KR" altLang="en-US" smtClean="0"/>
-              <a:t>2026-01-29</a:t>
+              <a:t>2026-02-01</a:t>
             </a:fld>
             <a:endParaRPr lang="ko-KR" altLang="en-US"/>
           </a:p>
@@ -1952,7 +1958,7 @@
           <a:p>
             <a:fld id="{221FCC47-94F7-4F07-959D-AD5A2CDDD26C}" type="datetimeFigureOut">
               <a:rPr lang="ko-KR" altLang="en-US" smtClean="0"/>
-              <a:t>2026-01-29</a:t>
+              <a:t>2026-02-01</a:t>
             </a:fld>
             <a:endParaRPr lang="ko-KR" altLang="en-US"/>
           </a:p>
@@ -2065,7 +2071,7 @@
           <a:p>
             <a:fld id="{221FCC47-94F7-4F07-959D-AD5A2CDDD26C}" type="datetimeFigureOut">
               <a:rPr lang="ko-KR" altLang="en-US" smtClean="0"/>
-              <a:t>2026-01-29</a:t>
+              <a:t>2026-02-01</a:t>
             </a:fld>
             <a:endParaRPr lang="ko-KR" altLang="en-US"/>
           </a:p>
@@ -2376,7 +2382,7 @@
           <a:p>
             <a:fld id="{221FCC47-94F7-4F07-959D-AD5A2CDDD26C}" type="datetimeFigureOut">
               <a:rPr lang="ko-KR" altLang="en-US" smtClean="0"/>
-              <a:t>2026-01-29</a:t>
+              <a:t>2026-02-01</a:t>
             </a:fld>
             <a:endParaRPr lang="ko-KR" altLang="en-US"/>
           </a:p>
@@ -2664,7 +2670,7 @@
           <a:p>
             <a:fld id="{221FCC47-94F7-4F07-959D-AD5A2CDDD26C}" type="datetimeFigureOut">
               <a:rPr lang="ko-KR" altLang="en-US" smtClean="0"/>
-              <a:t>2026-01-29</a:t>
+              <a:t>2026-02-01</a:t>
             </a:fld>
             <a:endParaRPr lang="ko-KR" altLang="en-US"/>
           </a:p>
@@ -2905,7 +2911,7 @@
           <a:p>
             <a:fld id="{221FCC47-94F7-4F07-959D-AD5A2CDDD26C}" type="datetimeFigureOut">
               <a:rPr lang="ko-KR" altLang="en-US" smtClean="0"/>
-              <a:t>2026-01-29</a:t>
+              <a:t>2026-02-01</a:t>
             </a:fld>
             <a:endParaRPr lang="ko-KR" altLang="en-US"/>
           </a:p>
@@ -3728,6 +3734,1098 @@
     <p:extLst>
       <p:ext uri="{BB962C8B-B14F-4D97-AF65-F5344CB8AC3E}">
         <p14:creationId xmlns:p14="http://schemas.microsoft.com/office/powerpoint/2010/main" val="1287014459"/>
+      </p:ext>
+    </p:extLst>
+  </p:cSld>
+  <p:clrMapOvr>
+    <a:masterClrMapping/>
+  </p:clrMapOvr>
+</p:sld>
+</file>
+
+<file path=ppt/slides/slide3.xml><?xml version="1.0" encoding="utf-8"?>
+<p:sld xmlns:a="http://schemas.openxmlformats.org/drawingml/2006/main" xmlns:r="http://schemas.openxmlformats.org/officeDocument/2006/relationships" xmlns:p="http://schemas.openxmlformats.org/presentationml/2006/main">
+  <p:cSld>
+    <p:spTree>
+      <p:nvGrpSpPr>
+        <p:cNvPr id="1" name=""/>
+        <p:cNvGrpSpPr/>
+        <p:nvPr/>
+      </p:nvGrpSpPr>
+      <p:grpSpPr>
+        <a:xfrm>
+          <a:off x="0" y="0"/>
+          <a:ext cx="0" cy="0"/>
+          <a:chOff x="0" y="0"/>
+          <a:chExt cx="0" cy="0"/>
+        </a:xfrm>
+      </p:grpSpPr>
+      <p:sp>
+        <p:nvSpPr>
+          <p:cNvPr id="2" name="직사각형 1">
+            <a:extLst>
+              <a:ext uri="{FF2B5EF4-FFF2-40B4-BE49-F238E27FC236}">
+                <a16:creationId xmlns:a16="http://schemas.microsoft.com/office/drawing/2014/main" id="{64285DA2-FD40-2B16-854E-C143E607B288}"/>
+              </a:ext>
+            </a:extLst>
+          </p:cNvPr>
+          <p:cNvSpPr/>
+          <p:nvPr/>
+        </p:nvSpPr>
+        <p:spPr>
+          <a:xfrm>
+            <a:off x="2117036" y="561566"/>
+            <a:ext cx="1282148" cy="874643"/>
+          </a:xfrm>
+          <a:prstGeom prst="rect">
+            <a:avLst/>
+          </a:prstGeom>
+          <a:solidFill>
+            <a:schemeClr val="accent4">
+              <a:lumMod val="20000"/>
+              <a:lumOff val="80000"/>
+            </a:schemeClr>
+          </a:solidFill>
+          <a:ln>
+            <a:noFill/>
+          </a:ln>
+        </p:spPr>
+        <p:style>
+          <a:lnRef idx="2">
+            <a:schemeClr val="accent1">
+              <a:shade val="15000"/>
+            </a:schemeClr>
+          </a:lnRef>
+          <a:fillRef idx="1">
+            <a:schemeClr val="accent1"/>
+          </a:fillRef>
+          <a:effectRef idx="0">
+            <a:schemeClr val="accent1"/>
+          </a:effectRef>
+          <a:fontRef idx="minor">
+            <a:schemeClr val="lt1"/>
+          </a:fontRef>
+        </p:style>
+        <p:txBody>
+          <a:bodyPr rtlCol="0" anchor="ctr"/>
+          <a:lstStyle/>
+          <a:p>
+            <a:pPr algn="ctr"/>
+            <a:r>
+              <a:rPr lang="ko-KR" altLang="en-US">
+                <a:solidFill>
+                  <a:schemeClr val="tx1"/>
+                </a:solidFill>
+              </a:rPr>
+              <a:t>웹</a:t>
+            </a:r>
+          </a:p>
+        </p:txBody>
+      </p:sp>
+      <p:sp>
+        <p:nvSpPr>
+          <p:cNvPr id="3" name="직사각형 2">
+            <a:extLst>
+              <a:ext uri="{FF2B5EF4-FFF2-40B4-BE49-F238E27FC236}">
+                <a16:creationId xmlns:a16="http://schemas.microsoft.com/office/drawing/2014/main" id="{08925E30-A1B2-5997-8944-1358E3EE0962}"/>
+              </a:ext>
+            </a:extLst>
+          </p:cNvPr>
+          <p:cNvSpPr/>
+          <p:nvPr/>
+        </p:nvSpPr>
+        <p:spPr>
+          <a:xfrm>
+            <a:off x="1421297" y="1868556"/>
+            <a:ext cx="2673626" cy="874643"/>
+          </a:xfrm>
+          <a:prstGeom prst="rect">
+            <a:avLst/>
+          </a:prstGeom>
+          <a:solidFill>
+            <a:schemeClr val="accent4">
+              <a:lumMod val="20000"/>
+              <a:lumOff val="80000"/>
+            </a:schemeClr>
+          </a:solidFill>
+          <a:ln>
+            <a:noFill/>
+          </a:ln>
+        </p:spPr>
+        <p:style>
+          <a:lnRef idx="2">
+            <a:schemeClr val="accent1">
+              <a:shade val="15000"/>
+            </a:schemeClr>
+          </a:lnRef>
+          <a:fillRef idx="1">
+            <a:schemeClr val="accent1"/>
+          </a:fillRef>
+          <a:effectRef idx="0">
+            <a:schemeClr val="accent1"/>
+          </a:effectRef>
+          <a:fontRef idx="minor">
+            <a:schemeClr val="lt1"/>
+          </a:fontRef>
+        </p:style>
+        <p:txBody>
+          <a:bodyPr rtlCol="0" anchor="ctr"/>
+          <a:lstStyle/>
+          <a:p>
+            <a:pPr algn="ctr"/>
+            <a:r>
+              <a:rPr lang="en-US" altLang="ko-KR" dirty="0">
+                <a:solidFill>
+                  <a:schemeClr val="tx1"/>
+                </a:solidFill>
+              </a:rPr>
+              <a:t>AI Agent</a:t>
+            </a:r>
+          </a:p>
+          <a:p>
+            <a:pPr algn="ctr"/>
+            <a:r>
+              <a:rPr lang="en-US" altLang="ko-KR" dirty="0">
+                <a:solidFill>
+                  <a:schemeClr val="tx1"/>
+                </a:solidFill>
+              </a:rPr>
+              <a:t>(</a:t>
+            </a:r>
+            <a:r>
+              <a:rPr lang="ko-KR" altLang="en-US" dirty="0">
+                <a:solidFill>
+                  <a:schemeClr val="tx1"/>
+                </a:solidFill>
+              </a:rPr>
+              <a:t>특정 회사 정보 수집</a:t>
+            </a:r>
+          </a:p>
+        </p:txBody>
+      </p:sp>
+      <p:sp>
+        <p:nvSpPr>
+          <p:cNvPr id="4" name="직사각형 3">
+            <a:extLst>
+              <a:ext uri="{FF2B5EF4-FFF2-40B4-BE49-F238E27FC236}">
+                <a16:creationId xmlns:a16="http://schemas.microsoft.com/office/drawing/2014/main" id="{DB5B39AC-F4F9-A729-DD7C-09F9EB5A7C45}"/>
+              </a:ext>
+            </a:extLst>
+          </p:cNvPr>
+          <p:cNvSpPr/>
+          <p:nvPr/>
+        </p:nvSpPr>
+        <p:spPr>
+          <a:xfrm>
+            <a:off x="1421297" y="3021496"/>
+            <a:ext cx="2673626" cy="874643"/>
+          </a:xfrm>
+          <a:prstGeom prst="rect">
+            <a:avLst/>
+          </a:prstGeom>
+          <a:solidFill>
+            <a:schemeClr val="accent4">
+              <a:lumMod val="20000"/>
+              <a:lumOff val="80000"/>
+            </a:schemeClr>
+          </a:solidFill>
+          <a:ln>
+            <a:noFill/>
+          </a:ln>
+        </p:spPr>
+        <p:style>
+          <a:lnRef idx="2">
+            <a:schemeClr val="accent1">
+              <a:shade val="15000"/>
+            </a:schemeClr>
+          </a:lnRef>
+          <a:fillRef idx="1">
+            <a:schemeClr val="accent1"/>
+          </a:fillRef>
+          <a:effectRef idx="0">
+            <a:schemeClr val="accent1"/>
+          </a:effectRef>
+          <a:fontRef idx="minor">
+            <a:schemeClr val="lt1"/>
+          </a:fontRef>
+        </p:style>
+        <p:txBody>
+          <a:bodyPr rtlCol="0" anchor="ctr"/>
+          <a:lstStyle/>
+          <a:p>
+            <a:pPr algn="ctr"/>
+            <a:r>
+              <a:rPr lang="en-US" altLang="ko-KR" dirty="0">
+                <a:solidFill>
+                  <a:schemeClr val="tx1"/>
+                </a:solidFill>
+              </a:rPr>
+              <a:t>AI Agent</a:t>
+            </a:r>
+          </a:p>
+          <a:p>
+            <a:pPr algn="ctr"/>
+            <a:r>
+              <a:rPr lang="en-US" altLang="ko-KR" dirty="0">
+                <a:solidFill>
+                  <a:schemeClr val="tx1"/>
+                </a:solidFill>
+              </a:rPr>
+              <a:t>(</a:t>
+            </a:r>
+            <a:r>
+              <a:rPr lang="ko-KR" altLang="en-US" dirty="0">
+                <a:solidFill>
+                  <a:schemeClr val="tx1"/>
+                </a:solidFill>
+              </a:rPr>
+              <a:t>분석 진행</a:t>
+            </a:r>
+            <a:r>
+              <a:rPr lang="en-US" altLang="ko-KR" dirty="0">
+                <a:solidFill>
+                  <a:schemeClr val="tx1"/>
+                </a:solidFill>
+              </a:rPr>
+              <a:t>)</a:t>
+            </a:r>
+            <a:endParaRPr lang="ko-KR" altLang="en-US" dirty="0">
+              <a:solidFill>
+                <a:schemeClr val="tx1"/>
+              </a:solidFill>
+            </a:endParaRPr>
+          </a:p>
+        </p:txBody>
+      </p:sp>
+      <p:sp>
+        <p:nvSpPr>
+          <p:cNvPr id="5" name="직사각형 4">
+            <a:extLst>
+              <a:ext uri="{FF2B5EF4-FFF2-40B4-BE49-F238E27FC236}">
+                <a16:creationId xmlns:a16="http://schemas.microsoft.com/office/drawing/2014/main" id="{0683F946-69AA-4D39-BDCD-6AED71799EDD}"/>
+              </a:ext>
+            </a:extLst>
+          </p:cNvPr>
+          <p:cNvSpPr/>
+          <p:nvPr/>
+        </p:nvSpPr>
+        <p:spPr>
+          <a:xfrm>
+            <a:off x="5476460" y="894521"/>
+            <a:ext cx="2117035" cy="874643"/>
+          </a:xfrm>
+          <a:prstGeom prst="rect">
+            <a:avLst/>
+          </a:prstGeom>
+          <a:solidFill>
+            <a:schemeClr val="accent4">
+              <a:lumMod val="20000"/>
+              <a:lumOff val="80000"/>
+            </a:schemeClr>
+          </a:solidFill>
+          <a:ln>
+            <a:noFill/>
+          </a:ln>
+        </p:spPr>
+        <p:style>
+          <a:lnRef idx="2">
+            <a:schemeClr val="accent1">
+              <a:shade val="15000"/>
+            </a:schemeClr>
+          </a:lnRef>
+          <a:fillRef idx="1">
+            <a:schemeClr val="accent1"/>
+          </a:fillRef>
+          <a:effectRef idx="0">
+            <a:schemeClr val="accent1"/>
+          </a:effectRef>
+          <a:fontRef idx="minor">
+            <a:schemeClr val="lt1"/>
+          </a:fontRef>
+        </p:style>
+        <p:txBody>
+          <a:bodyPr rtlCol="0" anchor="ctr"/>
+          <a:lstStyle/>
+          <a:p>
+            <a:pPr algn="ctr"/>
+            <a:r>
+              <a:rPr lang="ko-KR" altLang="en-US" dirty="0">
+                <a:solidFill>
+                  <a:schemeClr val="tx1"/>
+                </a:solidFill>
+              </a:rPr>
+              <a:t>주가 정보</a:t>
+            </a:r>
+            <a:endParaRPr lang="en-US" altLang="ko-KR" dirty="0">
+              <a:solidFill>
+                <a:schemeClr val="tx1"/>
+              </a:solidFill>
+            </a:endParaRPr>
+          </a:p>
+          <a:p>
+            <a:pPr algn="ctr"/>
+            <a:r>
+              <a:rPr lang="ko-KR" altLang="en-US" dirty="0">
+                <a:solidFill>
+                  <a:schemeClr val="tx1"/>
+                </a:solidFill>
+              </a:rPr>
+              <a:t>가져오기</a:t>
+            </a:r>
+          </a:p>
+        </p:txBody>
+      </p:sp>
+      <p:sp>
+        <p:nvSpPr>
+          <p:cNvPr id="6" name="직사각형 5">
+            <a:extLst>
+              <a:ext uri="{FF2B5EF4-FFF2-40B4-BE49-F238E27FC236}">
+                <a16:creationId xmlns:a16="http://schemas.microsoft.com/office/drawing/2014/main" id="{3DA9E156-99CB-14D9-DF5F-AD1F3638CA9B}"/>
+              </a:ext>
+            </a:extLst>
+          </p:cNvPr>
+          <p:cNvSpPr/>
+          <p:nvPr/>
+        </p:nvSpPr>
+        <p:spPr>
+          <a:xfrm>
+            <a:off x="5476459" y="1932369"/>
+            <a:ext cx="2117035" cy="874643"/>
+          </a:xfrm>
+          <a:prstGeom prst="rect">
+            <a:avLst/>
+          </a:prstGeom>
+          <a:solidFill>
+            <a:schemeClr val="accent4">
+              <a:lumMod val="20000"/>
+              <a:lumOff val="80000"/>
+            </a:schemeClr>
+          </a:solidFill>
+          <a:ln>
+            <a:noFill/>
+          </a:ln>
+        </p:spPr>
+        <p:style>
+          <a:lnRef idx="2">
+            <a:schemeClr val="accent1">
+              <a:shade val="15000"/>
+            </a:schemeClr>
+          </a:lnRef>
+          <a:fillRef idx="1">
+            <a:schemeClr val="accent1"/>
+          </a:fillRef>
+          <a:effectRef idx="0">
+            <a:schemeClr val="accent1"/>
+          </a:effectRef>
+          <a:fontRef idx="minor">
+            <a:schemeClr val="lt1"/>
+          </a:fontRef>
+        </p:style>
+        <p:txBody>
+          <a:bodyPr rtlCol="0" anchor="ctr"/>
+          <a:lstStyle/>
+          <a:p>
+            <a:pPr algn="ctr"/>
+            <a:r>
+              <a:rPr lang="ko-KR" altLang="en-US" dirty="0" err="1">
+                <a:solidFill>
+                  <a:schemeClr val="tx1"/>
+                </a:solidFill>
+              </a:rPr>
+              <a:t>재무재표</a:t>
+            </a:r>
+            <a:r>
+              <a:rPr lang="ko-KR" altLang="en-US" dirty="0">
+                <a:solidFill>
+                  <a:schemeClr val="tx1"/>
+                </a:solidFill>
+              </a:rPr>
+              <a:t> </a:t>
+            </a:r>
+            <a:endParaRPr lang="en-US" altLang="ko-KR" dirty="0">
+              <a:solidFill>
+                <a:schemeClr val="tx1"/>
+              </a:solidFill>
+            </a:endParaRPr>
+          </a:p>
+          <a:p>
+            <a:pPr algn="ctr"/>
+            <a:r>
+              <a:rPr lang="ko-KR" altLang="en-US" dirty="0">
+                <a:solidFill>
+                  <a:schemeClr val="tx1"/>
+                </a:solidFill>
+              </a:rPr>
+              <a:t>가져오기</a:t>
+            </a:r>
+          </a:p>
+        </p:txBody>
+      </p:sp>
+      <p:sp>
+        <p:nvSpPr>
+          <p:cNvPr id="7" name="직사각형 6">
+            <a:extLst>
+              <a:ext uri="{FF2B5EF4-FFF2-40B4-BE49-F238E27FC236}">
+                <a16:creationId xmlns:a16="http://schemas.microsoft.com/office/drawing/2014/main" id="{DD5CB090-9438-E0C2-3543-268A00CCE4CA}"/>
+              </a:ext>
+            </a:extLst>
+          </p:cNvPr>
+          <p:cNvSpPr/>
+          <p:nvPr/>
+        </p:nvSpPr>
+        <p:spPr>
+          <a:xfrm>
+            <a:off x="5479773" y="3046338"/>
+            <a:ext cx="2117035" cy="874643"/>
+          </a:xfrm>
+          <a:prstGeom prst="rect">
+            <a:avLst/>
+          </a:prstGeom>
+          <a:solidFill>
+            <a:schemeClr val="accent4">
+              <a:lumMod val="20000"/>
+              <a:lumOff val="80000"/>
+            </a:schemeClr>
+          </a:solidFill>
+          <a:ln>
+            <a:noFill/>
+          </a:ln>
+        </p:spPr>
+        <p:style>
+          <a:lnRef idx="2">
+            <a:schemeClr val="accent1">
+              <a:shade val="15000"/>
+            </a:schemeClr>
+          </a:lnRef>
+          <a:fillRef idx="1">
+            <a:schemeClr val="accent1"/>
+          </a:fillRef>
+          <a:effectRef idx="0">
+            <a:schemeClr val="accent1"/>
+          </a:effectRef>
+          <a:fontRef idx="minor">
+            <a:schemeClr val="lt1"/>
+          </a:fontRef>
+        </p:style>
+        <p:txBody>
+          <a:bodyPr rtlCol="0" anchor="ctr"/>
+          <a:lstStyle/>
+          <a:p>
+            <a:pPr algn="ctr"/>
+            <a:r>
+              <a:rPr lang="ko-KR" altLang="en-US" dirty="0">
+                <a:solidFill>
+                  <a:schemeClr val="tx1"/>
+                </a:solidFill>
+              </a:rPr>
+              <a:t>위험정보 </a:t>
+            </a:r>
+          </a:p>
+        </p:txBody>
+      </p:sp>
+      <p:sp>
+        <p:nvSpPr>
+          <p:cNvPr id="8" name="TextBox 7">
+            <a:extLst>
+              <a:ext uri="{FF2B5EF4-FFF2-40B4-BE49-F238E27FC236}">
+                <a16:creationId xmlns:a16="http://schemas.microsoft.com/office/drawing/2014/main" id="{F75551CF-E09A-7D7F-18FC-8CDB9D705E09}"/>
+              </a:ext>
+            </a:extLst>
+          </p:cNvPr>
+          <p:cNvSpPr txBox="1"/>
+          <p:nvPr/>
+        </p:nvSpPr>
+        <p:spPr>
+          <a:xfrm>
+            <a:off x="7742582" y="2191376"/>
+            <a:ext cx="1953805" cy="369332"/>
+          </a:xfrm>
+          <a:prstGeom prst="rect">
+            <a:avLst/>
+          </a:prstGeom>
+          <a:noFill/>
+        </p:spPr>
+        <p:txBody>
+          <a:bodyPr wrap="none" rtlCol="0">
+            <a:spAutoFit/>
+          </a:bodyPr>
+          <a:lstStyle/>
+          <a:p>
+            <a:r>
+              <a:rPr lang="en-US" altLang="ko-KR" dirty="0"/>
+              <a:t>FinenanceReader</a:t>
+            </a:r>
+            <a:endParaRPr lang="ko-KR" altLang="en-US" dirty="0"/>
+          </a:p>
+        </p:txBody>
+      </p:sp>
+      <p:sp>
+        <p:nvSpPr>
+          <p:cNvPr id="9" name="직사각형 8">
+            <a:extLst>
+              <a:ext uri="{FF2B5EF4-FFF2-40B4-BE49-F238E27FC236}">
+                <a16:creationId xmlns:a16="http://schemas.microsoft.com/office/drawing/2014/main" id="{17F5E4A9-EA1A-5AC9-22A0-C6E56FEE70E9}"/>
+              </a:ext>
+            </a:extLst>
+          </p:cNvPr>
+          <p:cNvSpPr/>
+          <p:nvPr/>
+        </p:nvSpPr>
+        <p:spPr>
+          <a:xfrm>
+            <a:off x="1421297" y="4219167"/>
+            <a:ext cx="2673626" cy="874643"/>
+          </a:xfrm>
+          <a:prstGeom prst="rect">
+            <a:avLst/>
+          </a:prstGeom>
+          <a:solidFill>
+            <a:schemeClr val="accent4">
+              <a:lumMod val="20000"/>
+              <a:lumOff val="80000"/>
+            </a:schemeClr>
+          </a:solidFill>
+          <a:ln>
+            <a:noFill/>
+          </a:ln>
+        </p:spPr>
+        <p:style>
+          <a:lnRef idx="2">
+            <a:schemeClr val="accent1">
+              <a:shade val="15000"/>
+            </a:schemeClr>
+          </a:lnRef>
+          <a:fillRef idx="1">
+            <a:schemeClr val="accent1"/>
+          </a:fillRef>
+          <a:effectRef idx="0">
+            <a:schemeClr val="accent1"/>
+          </a:effectRef>
+          <a:fontRef idx="minor">
+            <a:schemeClr val="lt1"/>
+          </a:fontRef>
+        </p:style>
+        <p:txBody>
+          <a:bodyPr rtlCol="0" anchor="ctr"/>
+          <a:lstStyle/>
+          <a:p>
+            <a:pPr algn="ctr"/>
+            <a:r>
+              <a:rPr lang="ko-KR" altLang="en-US" dirty="0">
+                <a:solidFill>
+                  <a:schemeClr val="tx1"/>
+                </a:solidFill>
+              </a:rPr>
+              <a:t>웹에 결과 </a:t>
+            </a:r>
+            <a:r>
+              <a:rPr lang="ko-KR" altLang="en-US" dirty="0" err="1">
+                <a:solidFill>
+                  <a:schemeClr val="tx1"/>
+                </a:solidFill>
+              </a:rPr>
+              <a:t>레포트</a:t>
+            </a:r>
+            <a:r>
+              <a:rPr lang="ko-KR" altLang="en-US" dirty="0">
+                <a:solidFill>
+                  <a:schemeClr val="tx1"/>
+                </a:solidFill>
+              </a:rPr>
+              <a:t> 출력</a:t>
+            </a:r>
+          </a:p>
+        </p:txBody>
+      </p:sp>
+      <p:sp>
+        <p:nvSpPr>
+          <p:cNvPr id="10" name="직사각형 9">
+            <a:extLst>
+              <a:ext uri="{FF2B5EF4-FFF2-40B4-BE49-F238E27FC236}">
+                <a16:creationId xmlns:a16="http://schemas.microsoft.com/office/drawing/2014/main" id="{996400A3-787C-4000-D991-C479CFD00939}"/>
+              </a:ext>
+            </a:extLst>
+          </p:cNvPr>
+          <p:cNvSpPr/>
+          <p:nvPr/>
+        </p:nvSpPr>
+        <p:spPr>
+          <a:xfrm>
+            <a:off x="1421297" y="5421791"/>
+            <a:ext cx="2673626" cy="874643"/>
+          </a:xfrm>
+          <a:prstGeom prst="rect">
+            <a:avLst/>
+          </a:prstGeom>
+          <a:solidFill>
+            <a:schemeClr val="accent4">
+              <a:lumMod val="20000"/>
+              <a:lumOff val="80000"/>
+            </a:schemeClr>
+          </a:solidFill>
+          <a:ln>
+            <a:noFill/>
+          </a:ln>
+        </p:spPr>
+        <p:style>
+          <a:lnRef idx="2">
+            <a:schemeClr val="accent1">
+              <a:shade val="15000"/>
+            </a:schemeClr>
+          </a:lnRef>
+          <a:fillRef idx="1">
+            <a:schemeClr val="accent1"/>
+          </a:fillRef>
+          <a:effectRef idx="0">
+            <a:schemeClr val="accent1"/>
+          </a:effectRef>
+          <a:fontRef idx="minor">
+            <a:schemeClr val="lt1"/>
+          </a:fontRef>
+        </p:style>
+        <p:txBody>
+          <a:bodyPr rtlCol="0" anchor="ctr"/>
+          <a:lstStyle/>
+          <a:p>
+            <a:pPr algn="ctr"/>
+            <a:r>
+              <a:rPr lang="en-US" altLang="ko-KR" dirty="0">
+                <a:solidFill>
+                  <a:schemeClr val="tx1"/>
+                </a:solidFill>
+              </a:rPr>
+              <a:t>Gmail </a:t>
+            </a:r>
+            <a:r>
+              <a:rPr lang="ko-KR" altLang="en-US" dirty="0">
+                <a:solidFill>
+                  <a:schemeClr val="tx1"/>
+                </a:solidFill>
+              </a:rPr>
+              <a:t>알람</a:t>
+            </a:r>
+          </a:p>
+        </p:txBody>
+      </p:sp>
+      <p:cxnSp>
+        <p:nvCxnSpPr>
+          <p:cNvPr id="12" name="직선 화살표 연결선 11">
+            <a:extLst>
+              <a:ext uri="{FF2B5EF4-FFF2-40B4-BE49-F238E27FC236}">
+                <a16:creationId xmlns:a16="http://schemas.microsoft.com/office/drawing/2014/main" id="{A41B8965-5AE0-0669-4EDD-176A0246F91E}"/>
+              </a:ext>
+            </a:extLst>
+          </p:cNvPr>
+          <p:cNvCxnSpPr>
+            <a:cxnSpLocks/>
+            <a:stCxn id="2" idx="2"/>
+          </p:cNvCxnSpPr>
+          <p:nvPr/>
+        </p:nvCxnSpPr>
+        <p:spPr>
+          <a:xfrm>
+            <a:off x="2758110" y="1436209"/>
+            <a:ext cx="0" cy="447250"/>
+          </a:xfrm>
+          <a:prstGeom prst="straightConnector1">
+            <a:avLst/>
+          </a:prstGeom>
+          <a:ln>
+            <a:tailEnd type="triangle"/>
+          </a:ln>
+        </p:spPr>
+        <p:style>
+          <a:lnRef idx="2">
+            <a:schemeClr val="accent1"/>
+          </a:lnRef>
+          <a:fillRef idx="0">
+            <a:schemeClr val="accent1"/>
+          </a:fillRef>
+          <a:effectRef idx="1">
+            <a:schemeClr val="accent1"/>
+          </a:effectRef>
+          <a:fontRef idx="minor">
+            <a:schemeClr val="tx1"/>
+          </a:fontRef>
+        </p:style>
+      </p:cxnSp>
+      <p:cxnSp>
+        <p:nvCxnSpPr>
+          <p:cNvPr id="14" name="직선 화살표 연결선 13">
+            <a:extLst>
+              <a:ext uri="{FF2B5EF4-FFF2-40B4-BE49-F238E27FC236}">
+                <a16:creationId xmlns:a16="http://schemas.microsoft.com/office/drawing/2014/main" id="{C62CD721-7936-2710-F394-B63006047F0B}"/>
+              </a:ext>
+            </a:extLst>
+          </p:cNvPr>
+          <p:cNvCxnSpPr>
+            <a:cxnSpLocks/>
+            <a:endCxn id="4" idx="0"/>
+          </p:cNvCxnSpPr>
+          <p:nvPr/>
+        </p:nvCxnSpPr>
+        <p:spPr>
+          <a:xfrm>
+            <a:off x="2758110" y="2728296"/>
+            <a:ext cx="0" cy="293200"/>
+          </a:xfrm>
+          <a:prstGeom prst="straightConnector1">
+            <a:avLst/>
+          </a:prstGeom>
+          <a:ln>
+            <a:tailEnd type="triangle"/>
+          </a:ln>
+        </p:spPr>
+        <p:style>
+          <a:lnRef idx="2">
+            <a:schemeClr val="accent1"/>
+          </a:lnRef>
+          <a:fillRef idx="0">
+            <a:schemeClr val="accent1"/>
+          </a:fillRef>
+          <a:effectRef idx="1">
+            <a:schemeClr val="accent1"/>
+          </a:effectRef>
+          <a:fontRef idx="minor">
+            <a:schemeClr val="tx1"/>
+          </a:fontRef>
+        </p:style>
+      </p:cxnSp>
+      <p:cxnSp>
+        <p:nvCxnSpPr>
+          <p:cNvPr id="16" name="직선 화살표 연결선 15">
+            <a:extLst>
+              <a:ext uri="{FF2B5EF4-FFF2-40B4-BE49-F238E27FC236}">
+                <a16:creationId xmlns:a16="http://schemas.microsoft.com/office/drawing/2014/main" id="{F1D9DFD6-360A-E954-FEB4-3B909EDEEE79}"/>
+              </a:ext>
+            </a:extLst>
+          </p:cNvPr>
+          <p:cNvCxnSpPr>
+            <a:cxnSpLocks/>
+          </p:cNvCxnSpPr>
+          <p:nvPr/>
+        </p:nvCxnSpPr>
+        <p:spPr>
+          <a:xfrm>
+            <a:off x="2758110" y="3925967"/>
+            <a:ext cx="0" cy="293200"/>
+          </a:xfrm>
+          <a:prstGeom prst="straightConnector1">
+            <a:avLst/>
+          </a:prstGeom>
+          <a:ln>
+            <a:tailEnd type="triangle"/>
+          </a:ln>
+        </p:spPr>
+        <p:style>
+          <a:lnRef idx="2">
+            <a:schemeClr val="accent1"/>
+          </a:lnRef>
+          <a:fillRef idx="0">
+            <a:schemeClr val="accent1"/>
+          </a:fillRef>
+          <a:effectRef idx="1">
+            <a:schemeClr val="accent1"/>
+          </a:effectRef>
+          <a:fontRef idx="minor">
+            <a:schemeClr val="tx1"/>
+          </a:fontRef>
+        </p:style>
+      </p:cxnSp>
+      <p:cxnSp>
+        <p:nvCxnSpPr>
+          <p:cNvPr id="17" name="직선 화살표 연결선 16">
+            <a:extLst>
+              <a:ext uri="{FF2B5EF4-FFF2-40B4-BE49-F238E27FC236}">
+                <a16:creationId xmlns:a16="http://schemas.microsoft.com/office/drawing/2014/main" id="{75949702-D169-165F-8E90-F61D93674CD7}"/>
+              </a:ext>
+            </a:extLst>
+          </p:cNvPr>
+          <p:cNvCxnSpPr>
+            <a:cxnSpLocks/>
+          </p:cNvCxnSpPr>
+          <p:nvPr/>
+        </p:nvCxnSpPr>
+        <p:spPr>
+          <a:xfrm>
+            <a:off x="2758110" y="5128591"/>
+            <a:ext cx="0" cy="293200"/>
+          </a:xfrm>
+          <a:prstGeom prst="straightConnector1">
+            <a:avLst/>
+          </a:prstGeom>
+          <a:ln>
+            <a:tailEnd type="triangle"/>
+          </a:ln>
+        </p:spPr>
+        <p:style>
+          <a:lnRef idx="2">
+            <a:schemeClr val="accent1"/>
+          </a:lnRef>
+          <a:fillRef idx="0">
+            <a:schemeClr val="accent1"/>
+          </a:fillRef>
+          <a:effectRef idx="1">
+            <a:schemeClr val="accent1"/>
+          </a:effectRef>
+          <a:fontRef idx="minor">
+            <a:schemeClr val="tx1"/>
+          </a:fontRef>
+        </p:style>
+      </p:cxnSp>
+      <p:grpSp>
+        <p:nvGrpSpPr>
+          <p:cNvPr id="27" name="그룹 26">
+            <a:extLst>
+              <a:ext uri="{FF2B5EF4-FFF2-40B4-BE49-F238E27FC236}">
+                <a16:creationId xmlns:a16="http://schemas.microsoft.com/office/drawing/2014/main" id="{6BBA4DEF-D613-6219-037A-531FC8CF7F19}"/>
+              </a:ext>
+            </a:extLst>
+          </p:cNvPr>
+          <p:cNvGrpSpPr/>
+          <p:nvPr/>
+        </p:nvGrpSpPr>
+        <p:grpSpPr>
+          <a:xfrm>
+            <a:off x="4835386" y="1331843"/>
+            <a:ext cx="641073" cy="2097155"/>
+            <a:chOff x="4835386" y="1331843"/>
+            <a:chExt cx="641073" cy="2380418"/>
+          </a:xfrm>
+        </p:grpSpPr>
+        <p:cxnSp>
+          <p:nvCxnSpPr>
+            <p:cNvPr id="20" name="직선 화살표 연결선 19">
+              <a:extLst>
+                <a:ext uri="{FF2B5EF4-FFF2-40B4-BE49-F238E27FC236}">
+                  <a16:creationId xmlns:a16="http://schemas.microsoft.com/office/drawing/2014/main" id="{4998A419-81B0-0F05-8299-425AA09A6E07}"/>
+                </a:ext>
+              </a:extLst>
+            </p:cNvPr>
+            <p:cNvCxnSpPr/>
+            <p:nvPr/>
+          </p:nvCxnSpPr>
+          <p:spPr>
+            <a:xfrm>
+              <a:off x="4835386" y="2437440"/>
+              <a:ext cx="641073" cy="0"/>
+            </a:xfrm>
+            <a:prstGeom prst="straightConnector1">
+              <a:avLst/>
+            </a:prstGeom>
+            <a:ln>
+              <a:tailEnd type="triangle"/>
+            </a:ln>
+          </p:spPr>
+          <p:style>
+            <a:lnRef idx="2">
+              <a:schemeClr val="accent1"/>
+            </a:lnRef>
+            <a:fillRef idx="0">
+              <a:schemeClr val="accent1"/>
+            </a:fillRef>
+            <a:effectRef idx="1">
+              <a:schemeClr val="accent1"/>
+            </a:effectRef>
+            <a:fontRef idx="minor">
+              <a:schemeClr val="tx1"/>
+            </a:fontRef>
+          </p:style>
+        </p:cxnSp>
+        <p:cxnSp>
+          <p:nvCxnSpPr>
+            <p:cNvPr id="22" name="직선 화살표 연결선 21">
+              <a:extLst>
+                <a:ext uri="{FF2B5EF4-FFF2-40B4-BE49-F238E27FC236}">
+                  <a16:creationId xmlns:a16="http://schemas.microsoft.com/office/drawing/2014/main" id="{FEC97641-B7D4-EDB5-222E-6C4CB98B01CB}"/>
+                </a:ext>
+              </a:extLst>
+            </p:cNvPr>
+            <p:cNvCxnSpPr>
+              <a:cxnSpLocks/>
+            </p:cNvCxnSpPr>
+            <p:nvPr/>
+          </p:nvCxnSpPr>
+          <p:spPr>
+            <a:xfrm>
+              <a:off x="4835386" y="1331843"/>
+              <a:ext cx="641073" cy="0"/>
+            </a:xfrm>
+            <a:prstGeom prst="straightConnector1">
+              <a:avLst/>
+            </a:prstGeom>
+            <a:ln>
+              <a:tailEnd type="triangle"/>
+            </a:ln>
+          </p:spPr>
+          <p:style>
+            <a:lnRef idx="2">
+              <a:schemeClr val="accent1"/>
+            </a:lnRef>
+            <a:fillRef idx="0">
+              <a:schemeClr val="accent1"/>
+            </a:fillRef>
+            <a:effectRef idx="1">
+              <a:schemeClr val="accent1"/>
+            </a:effectRef>
+            <a:fontRef idx="minor">
+              <a:schemeClr val="tx1"/>
+            </a:fontRef>
+          </p:style>
+        </p:cxnSp>
+        <p:cxnSp>
+          <p:nvCxnSpPr>
+            <p:cNvPr id="24" name="직선 화살표 연결선 23">
+              <a:extLst>
+                <a:ext uri="{FF2B5EF4-FFF2-40B4-BE49-F238E27FC236}">
+                  <a16:creationId xmlns:a16="http://schemas.microsoft.com/office/drawing/2014/main" id="{EC3F22DB-218D-49F2-BEAA-9A2219121234}"/>
+                </a:ext>
+              </a:extLst>
+            </p:cNvPr>
+            <p:cNvCxnSpPr/>
+            <p:nvPr/>
+          </p:nvCxnSpPr>
+          <p:spPr>
+            <a:xfrm>
+              <a:off x="4835386" y="3712261"/>
+              <a:ext cx="641073" cy="0"/>
+            </a:xfrm>
+            <a:prstGeom prst="straightConnector1">
+              <a:avLst/>
+            </a:prstGeom>
+            <a:ln>
+              <a:tailEnd type="triangle"/>
+            </a:ln>
+          </p:spPr>
+          <p:style>
+            <a:lnRef idx="2">
+              <a:schemeClr val="accent1"/>
+            </a:lnRef>
+            <a:fillRef idx="0">
+              <a:schemeClr val="accent1"/>
+            </a:fillRef>
+            <a:effectRef idx="1">
+              <a:schemeClr val="accent1"/>
+            </a:effectRef>
+            <a:fontRef idx="minor">
+              <a:schemeClr val="tx1"/>
+            </a:fontRef>
+          </p:style>
+        </p:cxnSp>
+        <p:cxnSp>
+          <p:nvCxnSpPr>
+            <p:cNvPr id="26" name="직선 연결선 25">
+              <a:extLst>
+                <a:ext uri="{FF2B5EF4-FFF2-40B4-BE49-F238E27FC236}">
+                  <a16:creationId xmlns:a16="http://schemas.microsoft.com/office/drawing/2014/main" id="{B83CE071-859E-E53F-998E-2127B2CFB87A}"/>
+                </a:ext>
+              </a:extLst>
+            </p:cNvPr>
+            <p:cNvCxnSpPr/>
+            <p:nvPr/>
+          </p:nvCxnSpPr>
+          <p:spPr>
+            <a:xfrm>
+              <a:off x="4835386" y="1331843"/>
+              <a:ext cx="0" cy="2370479"/>
+            </a:xfrm>
+            <a:prstGeom prst="line">
+              <a:avLst/>
+            </a:prstGeom>
+          </p:spPr>
+          <p:style>
+            <a:lnRef idx="2">
+              <a:schemeClr val="accent1"/>
+            </a:lnRef>
+            <a:fillRef idx="0">
+              <a:schemeClr val="accent1"/>
+            </a:fillRef>
+            <a:effectRef idx="1">
+              <a:schemeClr val="accent1"/>
+            </a:effectRef>
+            <a:fontRef idx="minor">
+              <a:schemeClr val="tx1"/>
+            </a:fontRef>
+          </p:style>
+        </p:cxnSp>
+      </p:grpSp>
+      <p:cxnSp>
+        <p:nvCxnSpPr>
+          <p:cNvPr id="29" name="직선 연결선 28">
+            <a:extLst>
+              <a:ext uri="{FF2B5EF4-FFF2-40B4-BE49-F238E27FC236}">
+                <a16:creationId xmlns:a16="http://schemas.microsoft.com/office/drawing/2014/main" id="{A951E952-3291-96AE-8D63-1766137F939D}"/>
+              </a:ext>
+            </a:extLst>
+          </p:cNvPr>
+          <p:cNvCxnSpPr>
+            <a:stCxn id="3" idx="3"/>
+          </p:cNvCxnSpPr>
+          <p:nvPr/>
+        </p:nvCxnSpPr>
+        <p:spPr>
+          <a:xfrm flipV="1">
+            <a:off x="4094923" y="2305877"/>
+            <a:ext cx="740463" cy="1"/>
+          </a:xfrm>
+          <a:prstGeom prst="line">
+            <a:avLst/>
+          </a:prstGeom>
+        </p:spPr>
+        <p:style>
+          <a:lnRef idx="2">
+            <a:schemeClr val="accent1"/>
+          </a:lnRef>
+          <a:fillRef idx="0">
+            <a:schemeClr val="accent1"/>
+          </a:fillRef>
+          <a:effectRef idx="1">
+            <a:schemeClr val="accent1"/>
+          </a:effectRef>
+          <a:fontRef idx="minor">
+            <a:schemeClr val="tx1"/>
+          </a:fontRef>
+        </p:style>
+      </p:cxnSp>
+      <p:sp>
+        <p:nvSpPr>
+          <p:cNvPr id="30" name="TextBox 29">
+            <a:extLst>
+              <a:ext uri="{FF2B5EF4-FFF2-40B4-BE49-F238E27FC236}">
+                <a16:creationId xmlns:a16="http://schemas.microsoft.com/office/drawing/2014/main" id="{F418CDD5-20DF-D8A7-41C4-EB5E0981C8B7}"/>
+              </a:ext>
+            </a:extLst>
+          </p:cNvPr>
+          <p:cNvSpPr txBox="1"/>
+          <p:nvPr/>
+        </p:nvSpPr>
+        <p:spPr>
+          <a:xfrm>
+            <a:off x="7742582" y="3298993"/>
+            <a:ext cx="877163" cy="369332"/>
+          </a:xfrm>
+          <a:prstGeom prst="rect">
+            <a:avLst/>
+          </a:prstGeom>
+          <a:noFill/>
+        </p:spPr>
+        <p:txBody>
+          <a:bodyPr wrap="none" rtlCol="0">
+            <a:spAutoFit/>
+          </a:bodyPr>
+          <a:lstStyle/>
+          <a:p>
+            <a:r>
+              <a:rPr lang="ko-KR" altLang="en-US" dirty="0"/>
+              <a:t>인터넷</a:t>
+            </a:r>
+          </a:p>
+        </p:txBody>
+      </p:sp>
+    </p:spTree>
+    <p:extLst>
+      <p:ext uri="{BB962C8B-B14F-4D97-AF65-F5344CB8AC3E}">
+        <p14:creationId xmlns:p14="http://schemas.microsoft.com/office/powerpoint/2010/main" val="3914439246"/>
       </p:ext>
     </p:extLst>
   </p:cSld>
